--- a/Schools_ML_Track/camp_2026/slides/DA/DA23.pptx
+++ b/Schools_ML_Track/camp_2026/slides/DA/DA23.pptx
@@ -117,7 +117,7 @@
   <p:extLst>
     <p:ext uri="{521415D9-36F7-43E2-AB2F-B90AF26B5E84}">
       <p14:sectionLst xmlns:p14="http://schemas.microsoft.com/office/powerpoint/2010/main">
-        <p14:section name="Opening" id="{2c95eaf6-3fba-9e1a-d047-5f014b5eed20}">
+        <p14:section name="Opening" id="{36944318-6761-7423-ead5-f56bf30ca287}">
           <p14:sldIdLst>
             <p14:sldId id="256"/>
             <p14:sldId id="257"/>
@@ -128,7 +128,7 @@
             <p14:sldId id="262"/>
           </p14:sldIdLst>
         </p14:section>
-        <p14:section name="Make and close" id="{acaef793-8303-0c9a-7c10-7c5bb82db9c3}">
+        <p14:section name="Make and close" id="{c753f940-3a5e-531b-33a4-c78850b429f8}">
           <p14:sldIdLst>
             <p14:sldId id="263"/>
             <p14:sldId id="264"/>

--- a/Schools_ML_Track/camp_2026/slides/DA/DA23.pptx
+++ b/Schools_ML_Track/camp_2026/slides/DA/DA23.pptx
@@ -117,7 +117,7 @@
   <p:extLst>
     <p:ext uri="{521415D9-36F7-43E2-AB2F-B90AF26B5E84}">
       <p14:sectionLst xmlns:p14="http://schemas.microsoft.com/office/powerpoint/2010/main">
-        <p14:section name="Opening" id="{36944318-6761-7423-ead5-f56bf30ca287}">
+        <p14:section name="Opening" id="{40bddca6-66f5-b226-5f6d-3eadad9a0b7c}">
           <p14:sldIdLst>
             <p14:sldId id="256"/>
             <p14:sldId id="257"/>
@@ -128,7 +128,7 @@
             <p14:sldId id="262"/>
           </p14:sldIdLst>
         </p14:section>
-        <p14:section name="Make and close" id="{c753f940-3a5e-531b-33a4-c78850b429f8}">
+        <p14:section name="Make and close" id="{c270af55-1a83-2ced-a097-5840df4fcc88}">
           <p14:sldIdLst>
             <p14:sldId id="263"/>
             <p14:sldId id="264"/>
@@ -4107,15 +4107,15 @@
           <a:p>
             <a:pPr algn="l" indent="0" marL="0">
               <a:lnSpc>
-                <a:spcPts val="3480"/>
+                <a:spcPts val="3360"/>
               </a:lnSpc>
               <a:spcAft>
-                <a:spcPts val="2520"/>
+                <a:spcPts val="2020"/>
               </a:spcAft>
               <a:buNone/>
             </a:pPr>
             <a:r>
-              <a:rPr lang="en-US" sz="2900" dirty="0">
+              <a:rPr lang="en-US" sz="2800" dirty="0">
                 <a:solidFill>
                   <a:srgbClr val="111111"/>
                 </a:solidFill>
@@ -4123,9 +4123,55 @@
                 <a:ea typeface="Lato" pitchFamily="34" charset="-122"/>
                 <a:cs typeface="Lato" pitchFamily="34" charset="-120"/>
               </a:rPr>
-              <a:t>Make five slides: my question; what data I used; what I did; my most useful finding with its chart; the limitation and next step. Save as showcase.pptx and keep a PDF and screenshots as a backup. Rehearse with a timer. Practise answering: where did this number come from, what did you clean, and what can this data not tell us.</a:t>
-            </a:r>
-            <a:endParaRPr lang="en-US" sz="2900" dirty="0"/>
+              <a:t>Make five slides: my question; what data I used; what I did; my most useful finding with its chart; the limitation and next step.</a:t>
+            </a:r>
+            <a:endParaRPr lang="en-US" sz="2800" dirty="0"/>
+          </a:p>
+          <a:p>
+            <a:pPr algn="l" indent="0" marL="0">
+              <a:lnSpc>
+                <a:spcPts val="3360"/>
+              </a:lnSpc>
+              <a:spcAft>
+                <a:spcPts val="2020"/>
+              </a:spcAft>
+              <a:buNone/>
+            </a:pPr>
+            <a:r>
+              <a:rPr lang="en-US" sz="2800" dirty="0">
+                <a:solidFill>
+                  <a:srgbClr val="111111"/>
+                </a:solidFill>
+                <a:latin typeface="Lato" pitchFamily="34" charset="0"/>
+                <a:ea typeface="Lato" pitchFamily="34" charset="-122"/>
+                <a:cs typeface="Lato" pitchFamily="34" charset="-120"/>
+              </a:rPr>
+              <a:t>Save as showcase.pptx and keep a PDF and screenshots as a backup.</a:t>
+            </a:r>
+            <a:endParaRPr lang="en-US" sz="2800" dirty="0"/>
+          </a:p>
+          <a:p>
+            <a:pPr algn="l" indent="0" marL="0">
+              <a:lnSpc>
+                <a:spcPts val="3360"/>
+              </a:lnSpc>
+              <a:spcAft>
+                <a:spcPts val="2020"/>
+              </a:spcAft>
+              <a:buNone/>
+            </a:pPr>
+            <a:r>
+              <a:rPr lang="en-US" sz="2800" dirty="0">
+                <a:solidFill>
+                  <a:srgbClr val="111111"/>
+                </a:solidFill>
+                <a:latin typeface="Lato" pitchFamily="34" charset="0"/>
+                <a:ea typeface="Lato" pitchFamily="34" charset="-122"/>
+                <a:cs typeface="Lato" pitchFamily="34" charset="-120"/>
+              </a:rPr>
+              <a:t>Rehearse with a timer.</a:t>
+            </a:r>
+            <a:endParaRPr lang="en-US" sz="2800" dirty="0"/>
           </a:p>
         </p:txBody>
       </p:sp>
@@ -4290,15 +4336,15 @@
           <a:p>
             <a:pPr algn="l" indent="0" marL="0">
               <a:lnSpc>
-                <a:spcPts val="3360"/>
+                <a:spcPts val="2640"/>
               </a:lnSpc>
               <a:spcAft>
-                <a:spcPts val="2520"/>
+                <a:spcPts val="2020"/>
               </a:spcAft>
               <a:buNone/>
             </a:pPr>
             <a:r>
-              <a:rPr lang="en-US" sz="2800" dirty="0">
+              <a:rPr lang="en-US" sz="2200" dirty="0">
                 <a:solidFill>
                   <a:srgbClr val="111111"/>
                 </a:solidFill>
@@ -4306,22 +4352,22 @@
                 <a:ea typeface="Lato" pitchFamily="34" charset="-122"/>
                 <a:cs typeface="Lato" pitchFamily="34" charset="-120"/>
               </a:rPr>
-              <a:t>Disclose any help or AI use. Show only invented or approved non-personal data. The instructor may follow the rehearsal with MODERN_AI_ORIENTATION.md, a 20-minute optional introduction with no assignment or mark.</a:t>
-            </a:r>
-            <a:endParaRPr lang="en-US" sz="2800" dirty="0"/>
+              <a:t>Practise answering: where did this number come from, what did you clean, and what can this data not tell us.</a:t>
+            </a:r>
+            <a:endParaRPr lang="en-US" sz="2200" dirty="0"/>
           </a:p>
           <a:p>
             <a:pPr algn="l" indent="0" marL="0">
               <a:lnSpc>
-                <a:spcPts val="3360"/>
+                <a:spcPts val="2640"/>
               </a:lnSpc>
               <a:spcAft>
-                <a:spcPts val="2520"/>
+                <a:spcPts val="2020"/>
               </a:spcAft>
               <a:buNone/>
             </a:pPr>
             <a:r>
-              <a:rPr lang="en-US" sz="2800" dirty="0">
+              <a:rPr lang="en-US" sz="2200" dirty="0">
                 <a:solidFill>
                   <a:srgbClr val="111111"/>
                 </a:solidFill>
@@ -4329,9 +4375,78 @@
                 <a:ea typeface="Lato" pitchFamily="34" charset="-122"/>
                 <a:cs typeface="Lato" pitchFamily="34" charset="-120"/>
               </a:rPr>
-              <a:t>Save it as DA23. Write two sentences: what you changed and how you checked it.</a:t>
-            </a:r>
-            <a:endParaRPr lang="en-US" sz="2800" dirty="0"/>
+              <a:t>Disclose any help or AI use.</a:t>
+            </a:r>
+            <a:endParaRPr lang="en-US" sz="2200" dirty="0"/>
+          </a:p>
+          <a:p>
+            <a:pPr algn="l" indent="0" marL="0">
+              <a:lnSpc>
+                <a:spcPts val="2640"/>
+              </a:lnSpc>
+              <a:spcAft>
+                <a:spcPts val="2020"/>
+              </a:spcAft>
+              <a:buNone/>
+            </a:pPr>
+            <a:r>
+              <a:rPr lang="en-US" sz="2200" dirty="0">
+                <a:solidFill>
+                  <a:srgbClr val="111111"/>
+                </a:solidFill>
+                <a:latin typeface="Lato" pitchFamily="34" charset="0"/>
+                <a:ea typeface="Lato" pitchFamily="34" charset="-122"/>
+                <a:cs typeface="Lato" pitchFamily="34" charset="-120"/>
+              </a:rPr>
+              <a:t>Show only invented or approved non-personal data.</a:t>
+            </a:r>
+            <a:endParaRPr lang="en-US" sz="2200" dirty="0"/>
+          </a:p>
+          <a:p>
+            <a:pPr algn="l" indent="0" marL="0">
+              <a:lnSpc>
+                <a:spcPts val="2640"/>
+              </a:lnSpc>
+              <a:spcAft>
+                <a:spcPts val="2020"/>
+              </a:spcAft>
+              <a:buNone/>
+            </a:pPr>
+            <a:r>
+              <a:rPr lang="en-US" sz="2200" dirty="0">
+                <a:solidFill>
+                  <a:srgbClr val="111111"/>
+                </a:solidFill>
+                <a:latin typeface="Lato" pitchFamily="34" charset="0"/>
+                <a:ea typeface="Lato" pitchFamily="34" charset="-122"/>
+                <a:cs typeface="Lato" pitchFamily="34" charset="-120"/>
+              </a:rPr>
+              <a:t>The instructor may follow the rehearsal with MODERN_AI_ORIENTATION.md, a 20-minute optional introduction with no assignment or mark.</a:t>
+            </a:r>
+            <a:endParaRPr lang="en-US" sz="2200" dirty="0"/>
+          </a:p>
+          <a:p>
+            <a:pPr algn="l" indent="0" marL="0">
+              <a:lnSpc>
+                <a:spcPts val="2640"/>
+              </a:lnSpc>
+              <a:spcAft>
+                <a:spcPts val="2020"/>
+              </a:spcAft>
+              <a:buNone/>
+            </a:pPr>
+            <a:r>
+              <a:rPr lang="en-US" sz="2200" dirty="0">
+                <a:solidFill>
+                  <a:srgbClr val="111111"/>
+                </a:solidFill>
+                <a:latin typeface="Lato" pitchFamily="34" charset="0"/>
+                <a:ea typeface="Lato" pitchFamily="34" charset="-122"/>
+                <a:cs typeface="Lato" pitchFamily="34" charset="-120"/>
+              </a:rPr>
+              <a:t>Write two sentences: what you changed and how you checked it.</a:t>
+            </a:r>
+            <a:endParaRPr lang="en-US" sz="2200" dirty="0"/>
           </a:p>
         </p:txBody>
       </p:sp>
